--- a/report/발표자료_소주제_수납대사검증_및_창구업무복잡도최적화_12장.pptx
+++ b/report/발표자료_소주제_수납대사검증_및_창구업무복잡도최적화_12장.pptx
@@ -3480,7 +3480,7 @@
                 </a:solidFill>
                 <a:latin typeface="맑은 고딕"/>
               </a:rPr>
-              <a:t>분석팀: Team 3 (엔지니어링 &amp; 비즈니스 최적화 — 수납·재무 파트 백선영)</a:t>
+              <a:t>분석팀: Team 3 (엔지니어링 &amp; 비즈니스 최적화 — 수납·재무 파트)</a:t>
             </a:r>
           </a:p>
           <a:p>
@@ -7268,7 +7268,7 @@
                 </a:solidFill>
                 <a:latin typeface="맑은 고딕"/>
               </a:rPr>
-              <a:t>백선영 · 1. 개요 (수납·재정 대사 및 창구 복잡도 분석 프레임워크)</a:t>
+              <a:t>팀 3 · 1. 개요 (수납·재정 대사 및 창구 복잡도 분석 프레임워크)</a:t>
             </a:r>
           </a:p>
         </p:txBody>
@@ -17441,7 +17441,7 @@
         <p:spPr>
           <a:xfrm>
             <a:off x="1143000" y="1792224"/>
-            <a:ext cx="4356608" cy="2450592"/>
+            <a:ext cx="4339590" cy="2450592"/>
           </a:xfrm>
           <a:prstGeom prst="rect">
             <a:avLst/>
@@ -17512,7 +17512,7 @@
         <p:spPr>
           <a:xfrm>
             <a:off x="6629400" y="1792224"/>
-            <a:ext cx="4356608" cy="2450592"/>
+            <a:ext cx="4339590" cy="2450592"/>
           </a:xfrm>
           <a:prstGeom prst="rect">
             <a:avLst/>
